--- a/smoke_samples/04_placeholders.pptx
+++ b/smoke_samples/04_placeholders.pptx
@@ -231,7 +231,7 @@
         <p:spPr>
           <a:xfrm>
             <a:off x="457200" y="274638"/>
-            <a:ext cx="8230200" cy="1143000"/>
+            <a:ext cx="8229600" cy="1143000"/>
           </a:xfrm>
           <a:prstGeom prst="rect">
             <a:avLst/>
@@ -244,7 +244,7 @@
           <a:p>
             <a:pPr algn="l"/>
             <a:r>
-              <a:rPr lang="en-US" sz="4400" b="1" i="0" dirty="0"/>
+              <a:rPr lang="en-US" sz="4400" b="0" i="0" u="none" dirty="0"/>
               <a:t>Placeholder Overrides</a:t>
             </a:r>
           </a:p>
@@ -329,7 +329,7 @@
         <p:spPr>
           <a:xfrm>
             <a:off x="457200" y="274638"/>
-            <a:ext cx="8230200" cy="1143000"/>
+            <a:ext cx="8229600" cy="1143000"/>
           </a:xfrm>
           <a:prstGeom prst="rect">
             <a:avLst/>
@@ -342,7 +342,7 @@
           <a:p>
             <a:pPr algn="l"/>
             <a:r>
-              <a:rPr lang="en-US" sz="4400" b="1" i="0" dirty="0"/>
+              <a:rPr lang="en-US" sz="4400" b="0" i="0" u="none" dirty="0"/>
               <a:t>Placeholder Image</a:t>
             </a:r>
           </a:p>
@@ -409,7 +409,7 @@
         <p:spPr>
           <a:xfrm>
             <a:off x="457200" y="274638"/>
-            <a:ext cx="8230200" cy="1143000"/>
+            <a:ext cx="8229600" cy="1143000"/>
           </a:xfrm>
           <a:prstGeom prst="rect">
             <a:avLst/>
@@ -422,7 +422,7 @@
           <a:p>
             <a:pPr algn="l"/>
             <a:r>
-              <a:rPr lang="en-US" sz="4400" b="1" i="0" dirty="0"/>
+              <a:rPr lang="en-US" sz="4400" b="0" i="0" u="none" dirty="0"/>
               <a:t>Placeholder Table</a:t>
             </a:r>
           </a:p>

--- a/smoke_samples/04_placeholders.pptx
+++ b/smoke_samples/04_placeholders.pptx
@@ -260,7 +260,7 @@
       <p:cNvPr id="3" name="Placeholder 0"/>
       <p:cNvSpPr txBox="1"/>
       <p:nvPr>
-        <p:ph idx="0"/>
+        <p:ph idx="0" type="title"/>
       </p:nvPr>
     </p:nvSpPr>
     <p:spPr/>
@@ -280,7 +280,7 @@
       <p:cNvPr id="4" name="Placeholder 1"/>
       <p:cNvSpPr txBox="1"/>
       <p:nvPr>
-        <p:ph idx="1"/>
+        <p:ph idx="1" type="body"/>
       </p:nvPr>
     </p:nvSpPr>
     <p:spPr/>
@@ -360,7 +360,7 @@
         <a:picLocks noChangeAspect="1"/>
       </p:cNvPicPr>
       <p:nvPr>
-        <p:ph idx="1"/>
+        <p:ph idx="1" type="picture"/>
       </p:nvPr>
     </p:nvPicPr>
     <p:blipFill>
@@ -440,7 +440,7 @@
         <a:graphicFrameLocks noGrp="1"/>
       </p:cNvGraphicFramePr>
       <p:nvPr>
-        <p:ph idx="1"/>
+        <p:ph idx="1" type="body"/>
       </p:nvPr>
     </p:nvGraphicFramePr>
     <a:graphic>

--- a/smoke_samples/04_placeholders.pptx
+++ b/smoke_samples/04_placeholders.pptx
@@ -203,11 +203,6 @@
 <file path=ppt/slides/slide1.xml><?xml version="1.0" encoding="utf-8"?>
 <p:sld xmlns:a="http://schemas.openxmlformats.org/drawingml/2006/main" xmlns:c="http://schemas.openxmlformats.org/drawingml/2006/chart" xmlns:r="http://schemas.openxmlformats.org/officeDocument/2006/relationships" xmlns:p="http://schemas.openxmlformats.org/presentationml/2006/main">
   <p:cSld>
-    <p:bg>
-      <p:bgRef idx="1001">
-        <a:schemeClr val="bg1"/>
-      </p:bgRef>
-    </p:bg>
     <p:spTree>
       <p:nvGrpSpPr>
         <p:cNvPr id="1" name=""/>
@@ -301,11 +296,6 @@
 <file path=ppt/slides/slide2.xml><?xml version="1.0" encoding="utf-8"?>
 <p:sld xmlns:a="http://schemas.openxmlformats.org/drawingml/2006/main" xmlns:c="http://schemas.openxmlformats.org/drawingml/2006/chart" xmlns:r="http://schemas.openxmlformats.org/officeDocument/2006/relationships" xmlns:p="http://schemas.openxmlformats.org/presentationml/2006/main">
   <p:cSld>
-    <p:bg>
-      <p:bgRef idx="1001">
-        <a:schemeClr val="bg1"/>
-      </p:bgRef>
-    </p:bg>
     <p:spTree>
       <p:nvGrpSpPr>
         <p:cNvPr id="1" name=""/>
@@ -381,11 +371,6 @@
 <file path=ppt/slides/slide3.xml><?xml version="1.0" encoding="utf-8"?>
 <p:sld xmlns:a="http://schemas.openxmlformats.org/drawingml/2006/main" xmlns:c="http://schemas.openxmlformats.org/drawingml/2006/chart" xmlns:r="http://schemas.openxmlformats.org/officeDocument/2006/relationships" xmlns:p="http://schemas.openxmlformats.org/presentationml/2006/main">
   <p:cSld>
-    <p:bg>
-      <p:bgRef idx="1001">
-        <a:schemeClr val="bg1"/>
-      </p:bgRef>
-    </p:bg>
     <p:spTree>
       <p:nvGrpSpPr>
         <p:cNvPr id="1" name=""/>
@@ -515,9 +500,9 @@
 </file>
 
 <file path=ppt/theme/theme1.xml><?xml version="1.0" encoding="utf-8"?>
-<a:theme xmlns:a="http://schemas.openxmlformats.org/drawingml/2006/main" name="Office Theme">
+<a:theme xmlns:a="http://schemas.openxmlformats.org/drawingml/2006/main" name="Office Theme marketing">
   <a:themeElements>
-    <a:clrScheme name="Office">
+    <a:clrScheme name="Office colors">
       <a:dk1>
         <a:sysClr val="windowText" lastClr="000000"/>
       </a:dk1>
@@ -555,7 +540,7 @@
         <a:srgbClr val="800080"/>
       </a:folHlink>
     </a:clrScheme>
-    <a:fontScheme name="Office">
+    <a:fontScheme name="Office fonts">
       <a:majorFont>
         <a:latin typeface="Calibri"/>
         <a:ea typeface=""/>
